--- a/update/compatibility/fig/figures.pptx
+++ b/update/compatibility/fig/figures.pptx
@@ -3737,8 +3737,8 @@
         </p:nvSpPr>
         <p:spPr>
           <a:xfrm>
-            <a:off x="4077328" y="708500"/>
-            <a:ext cx="3198592" cy="369332"/>
+            <a:off x="4077328" y="617060"/>
+            <a:ext cx="3198592" cy="646331"/>
           </a:xfrm>
           <a:prstGeom prst="rect">
             <a:avLst/>
@@ -3755,7 +3755,7 @@
               <a:rPr lang="en-US" altLang="zh-CN" b="1" dirty="0">
                 <a:latin typeface="Trebuchet MS" panose="020B0703020202090204" pitchFamily="34" charset="0"/>
               </a:rPr>
-              <a:t>Static Oriented Reasoning</a:t>
+              <a:t>Static-oriented Incompatibility Reasoning</a:t>
             </a:r>
             <a:endParaRPr lang="zh-CN" altLang="en-US" b="1" dirty="0">
               <a:latin typeface="Trebuchet MS" panose="020B0703020202090204" pitchFamily="34" charset="0"/>
@@ -4127,7 +4127,7 @@
               <a:rPr lang="en-US" altLang="zh-CN" b="1" dirty="0">
                 <a:latin typeface="Trebuchet MS" panose="020B0703020202090204" pitchFamily="34" charset="0"/>
               </a:rPr>
-              <a:t>Dynamic Simulated Reflection</a:t>
+              <a:t>Dynamic-simulated Reflection</a:t>
             </a:r>
             <a:endParaRPr lang="zh-CN" altLang="en-US" b="1" dirty="0">
               <a:latin typeface="Trebuchet MS" panose="020B0703020202090204" pitchFamily="34" charset="0"/>

--- a/update/compatibility/fig/figures.pptx
+++ b/update/compatibility/fig/figures.pptx
@@ -4127,7 +4127,7 @@
               <a:rPr lang="en-US" altLang="zh-CN" b="1" dirty="0">
                 <a:latin typeface="Trebuchet MS" panose="020B0703020202090204" pitchFamily="34" charset="0"/>
               </a:rPr>
-              <a:t>Dynamic-simulated Reflection</a:t>
+              <a:t>Dynamic Simulated Reflection</a:t>
             </a:r>
             <a:endParaRPr lang="zh-CN" altLang="en-US" b="1" dirty="0">
               <a:latin typeface="Trebuchet MS" panose="020B0703020202090204" pitchFamily="34" charset="0"/>
